--- a/112-2/CI5218701 色彩學在影像與照明產業之應用/介紹(資管所_黃雅婄) 色彩產業應用.pptx
+++ b/112-2/CI5218701 色彩學在影像與照明產業之應用/介紹(資管所_黃雅婄) 色彩產業應用.pptx
@@ -297,7 +297,7 @@
               <a:pPr>
                 <a:defRPr/>
               </a:pPr>
-              <a:t>2024/2/26</a:t>
+              <a:t>2026/6/16</a:t>
             </a:fld>
             <a:endParaRPr lang="en-US" altLang="zh-TW"/>
           </a:p>
@@ -5252,7 +5252,7 @@
                 <a:ea typeface="Kaiti TC" panose="02010600040101010101" pitchFamily="2" charset="-120"/>
                 <a:cs typeface="Times New Roman" panose="02020603050405020304" pitchFamily="18" charset="0"/>
               </a:rPr>
-              <a:t> 科技赴能，個案分析</a:t>
+              <a:t> 科技賦能，個案分析</a:t>
             </a:r>
             <a:endParaRPr lang="en-US" altLang="zh-TW" sz="2000" b="0" dirty="0">
               <a:latin typeface="Times New Roman" panose="02020603050405020304" pitchFamily="18" charset="0"/>
